--- a/DR_Progress_Update.pptx
+++ b/DR_Progress_Update.pptx
@@ -22743,7 +22743,7 @@
                 </a:solidFill>
                 <a:latin typeface="Arial"/>
               </a:rPr>
-              <a:t>• Arms A, B, C: original run and group-split run, 3 seeds each, evaluated</a:t>
+              <a:t>• Arms A, B, C: original and group-split runs, 3 seeds each, with 95% intervals, ECE and Brier</a:t>
             </a:r>
           </a:p>
           <a:p>
@@ -23544,7 +23544,7 @@
                 </a:solidFill>
                 <a:latin typeface="Arial"/>
               </a:rPr>
-              <a:t>Mean ± sd over seeds 42, 43, 44</a:t>
+              <a:t>Mean and 95% interval over seeds 42, 43, 44</a:t>
             </a:r>
           </a:p>
         </p:txBody>
@@ -23593,7 +23593,7 @@
         <p:spPr>
           <a:xfrm>
             <a:off x="502920" y="1280160"/>
-            <a:ext cx="2834640" cy="292608"/>
+            <a:ext cx="2286000" cy="292608"/>
           </a:xfrm>
           <a:prstGeom prst="roundRect">
             <a:avLst/>
@@ -23646,8 +23646,8 @@
         </p:nvSpPr>
         <p:spPr>
           <a:xfrm>
-            <a:off x="3429000" y="1280160"/>
-            <a:ext cx="1737360" cy="292608"/>
+            <a:off x="2880360" y="1280160"/>
+            <a:ext cx="1920240" cy="292608"/>
           </a:xfrm>
           <a:prstGeom prst="roundRect">
             <a:avLst/>
@@ -23700,8 +23700,8 @@
         </p:nvSpPr>
         <p:spPr>
           <a:xfrm>
-            <a:off x="5257800" y="1280160"/>
-            <a:ext cx="1737360" cy="292608"/>
+            <a:off x="4846320" y="1280160"/>
+            <a:ext cx="1920240" cy="292608"/>
           </a:xfrm>
           <a:prstGeom prst="roundRect">
             <a:avLst/>
@@ -23754,8 +23754,8 @@
         </p:nvSpPr>
         <p:spPr>
           <a:xfrm>
-            <a:off x="7086600" y="1280160"/>
-            <a:ext cx="1554480" cy="292608"/>
+            <a:off x="6812280" y="1280160"/>
+            <a:ext cx="1828800" cy="292608"/>
           </a:xfrm>
           <a:prstGeom prst="roundRect">
             <a:avLst/>
@@ -23809,7 +23809,7 @@
         <p:spPr>
           <a:xfrm>
             <a:off x="502920" y="1627632"/>
-            <a:ext cx="2834640" cy="411480"/>
+            <a:ext cx="2286000" cy="356616"/>
           </a:xfrm>
           <a:prstGeom prst="roundRect">
             <a:avLst/>
@@ -23849,21 +23849,21 @@
                 </a:solidFill>
                 <a:latin typeface="Arial"/>
               </a:rPr>
-              <a:t>DDR: sensitivity at frozen threshold</a:t>
+              <a:t>DDR: sensitivity</a:t>
             </a:r>
           </a:p>
         </p:txBody>
       </p:sp>
       <p:sp>
         <p:nvSpPr>
-          <p:cNvPr id="206" name="V03.75"/>
+          <p:cNvPr id="206" name="V03.15"/>
           <p:cNvSpPr/>
           <p:nvPr/>
         </p:nvSpPr>
         <p:spPr>
           <a:xfrm>
-            <a:off x="3429000" y="1627632"/>
-            <a:ext cx="1737360" cy="411480"/>
+            <a:off x="2880360" y="1627632"/>
+            <a:ext cx="1920240" cy="356616"/>
           </a:xfrm>
           <a:prstGeom prst="roundRect">
             <a:avLst/>
@@ -23903,21 +23903,21 @@
                 </a:solidFill>
                 <a:latin typeface="Arial"/>
               </a:rPr>
-              <a:t>0.941 ± 0.009</a:t>
+              <a:t>0.941 (0.926-0.955)</a:t>
             </a:r>
           </a:p>
         </p:txBody>
       </p:sp>
       <p:sp>
         <p:nvSpPr>
-          <p:cNvPr id="207" name="V05.75"/>
+          <p:cNvPr id="207" name="V05.3"/>
           <p:cNvSpPr/>
           <p:nvPr/>
         </p:nvSpPr>
         <p:spPr>
           <a:xfrm>
-            <a:off x="5257800" y="1627632"/>
-            <a:ext cx="1737360" cy="411480"/>
+            <a:off x="4846320" y="1627632"/>
+            <a:ext cx="1920240" cy="356616"/>
           </a:xfrm>
           <a:prstGeom prst="roundRect">
             <a:avLst/>
@@ -23957,21 +23957,21 @@
                 </a:solidFill>
                 <a:latin typeface="Arial"/>
               </a:rPr>
-              <a:t>0.925 ± 0.004</a:t>
+              <a:t>0.925 (0.909-0.941)</a:t>
             </a:r>
           </a:p>
         </p:txBody>
       </p:sp>
       <p:sp>
         <p:nvSpPr>
-          <p:cNvPr id="208" name="V07.75"/>
+          <p:cNvPr id="208" name="V07.45"/>
           <p:cNvSpPr/>
           <p:nvPr/>
         </p:nvSpPr>
         <p:spPr>
           <a:xfrm>
-            <a:off x="7086600" y="1627632"/>
-            <a:ext cx="1554480" cy="411480"/>
+            <a:off x="6812280" y="1627632"/>
+            <a:ext cx="1828800" cy="356616"/>
           </a:xfrm>
           <a:prstGeom prst="roundRect">
             <a:avLst/>
@@ -24011,7 +24011,7 @@
                 </a:solidFill>
                 <a:latin typeface="Arial"/>
               </a:rPr>
-              <a:t>0.938 ± 0.005</a:t>
+              <a:t>0.938 (0.923-0.953)</a:t>
             </a:r>
           </a:p>
         </p:txBody>
@@ -24024,8 +24024,8 @@
         </p:nvSpPr>
         <p:spPr>
           <a:xfrm>
-            <a:off x="502920" y="2084832"/>
-            <a:ext cx="2834640" cy="411480"/>
+            <a:off x="502920" y="2020824"/>
+            <a:ext cx="2286000" cy="356616"/>
           </a:xfrm>
           <a:prstGeom prst="roundRect">
             <a:avLst/>
@@ -24072,14 +24072,14 @@
       </p:sp>
       <p:sp>
         <p:nvSpPr>
-          <p:cNvPr id="210" name="V13.75"/>
+          <p:cNvPr id="210" name="V13.15"/>
           <p:cNvSpPr/>
           <p:nvPr/>
         </p:nvSpPr>
         <p:spPr>
           <a:xfrm>
-            <a:off x="3429000" y="2084832"/>
-            <a:ext cx="1737360" cy="411480"/>
+            <a:off x="2880360" y="2020824"/>
+            <a:ext cx="1920240" cy="356616"/>
           </a:xfrm>
           <a:prstGeom prst="roundRect">
             <a:avLst/>
@@ -24119,21 +24119,21 @@
                 </a:solidFill>
                 <a:latin typeface="Arial"/>
               </a:rPr>
-              <a:t>0.780 ± 0.006</a:t>
+              <a:t>0.780 (0.762-0.799)</a:t>
             </a:r>
           </a:p>
         </p:txBody>
       </p:sp>
       <p:sp>
         <p:nvSpPr>
-          <p:cNvPr id="211" name="V15.75"/>
+          <p:cNvPr id="211" name="V15.3"/>
           <p:cNvSpPr/>
           <p:nvPr/>
         </p:nvSpPr>
         <p:spPr>
           <a:xfrm>
-            <a:off x="5257800" y="2084832"/>
-            <a:ext cx="1737360" cy="411480"/>
+            <a:off x="4846320" y="2020824"/>
+            <a:ext cx="1920240" cy="356616"/>
           </a:xfrm>
           <a:prstGeom prst="roundRect">
             <a:avLst/>
@@ -24173,21 +24173,21 @@
                 </a:solidFill>
                 <a:latin typeface="Arial"/>
               </a:rPr>
-              <a:t>0.884 ± 0.002</a:t>
+              <a:t>0.884 (0.870-0.897)</a:t>
             </a:r>
           </a:p>
         </p:txBody>
       </p:sp>
       <p:sp>
         <p:nvSpPr>
-          <p:cNvPr id="212" name="V17.75"/>
+          <p:cNvPr id="212" name="V17.45"/>
           <p:cNvSpPr/>
           <p:nvPr/>
         </p:nvSpPr>
         <p:spPr>
           <a:xfrm>
-            <a:off x="7086600" y="2084832"/>
-            <a:ext cx="1554480" cy="411480"/>
+            <a:off x="6812280" y="2020824"/>
+            <a:ext cx="1828800" cy="356616"/>
           </a:xfrm>
           <a:prstGeom prst="roundRect">
             <a:avLst/>
@@ -24227,7 +24227,7 @@
                 </a:solidFill>
                 <a:latin typeface="Arial"/>
               </a:rPr>
-              <a:t>0.717 ± 0.011</a:t>
+              <a:t>0.717 (0.698-0.738)</a:t>
             </a:r>
           </a:p>
         </p:txBody>
@@ -24240,8 +24240,8 @@
         </p:nvSpPr>
         <p:spPr>
           <a:xfrm>
-            <a:off x="502920" y="2542032"/>
-            <a:ext cx="2834640" cy="411480"/>
+            <a:off x="502920" y="2414016"/>
+            <a:ext cx="2286000" cy="356616"/>
           </a:xfrm>
           <a:prstGeom prst="roundRect">
             <a:avLst/>
@@ -24281,21 +24281,21 @@
                 </a:solidFill>
                 <a:latin typeface="Arial"/>
               </a:rPr>
-              <a:t>EyePACS: specificity at frozen threshold</a:t>
+              <a:t>EyePACS: specificity</a:t>
             </a:r>
           </a:p>
         </p:txBody>
       </p:sp>
       <p:sp>
         <p:nvSpPr>
-          <p:cNvPr id="214" name="V23.75"/>
+          <p:cNvPr id="214" name="V23.15"/>
           <p:cNvSpPr/>
           <p:nvPr/>
         </p:nvSpPr>
         <p:spPr>
           <a:xfrm>
-            <a:off x="3429000" y="2542032"/>
-            <a:ext cx="1737360" cy="411480"/>
+            <a:off x="2880360" y="2414016"/>
+            <a:ext cx="1920240" cy="356616"/>
           </a:xfrm>
           <a:prstGeom prst="roundRect">
             <a:avLst/>
@@ -24335,21 +24335,21 @@
                 </a:solidFill>
                 <a:latin typeface="Arial"/>
               </a:rPr>
-              <a:t>0.438 ± 0.019</a:t>
+              <a:t>0.438</a:t>
             </a:r>
           </a:p>
         </p:txBody>
       </p:sp>
       <p:sp>
         <p:nvSpPr>
-          <p:cNvPr id="215" name="V25.75"/>
+          <p:cNvPr id="215" name="V25.3"/>
           <p:cNvSpPr/>
           <p:nvPr/>
         </p:nvSpPr>
         <p:spPr>
           <a:xfrm>
-            <a:off x="5257800" y="2542032"/>
-            <a:ext cx="1737360" cy="411480"/>
+            <a:off x="4846320" y="2414016"/>
+            <a:ext cx="1920240" cy="356616"/>
           </a:xfrm>
           <a:prstGeom prst="roundRect">
             <a:avLst/>
@@ -24389,21 +24389,21 @@
                 </a:solidFill>
                 <a:latin typeface="Arial"/>
               </a:rPr>
-              <a:t>0.898 ± 0.004</a:t>
+              <a:t>0.898</a:t>
             </a:r>
           </a:p>
         </p:txBody>
       </p:sp>
       <p:sp>
         <p:nvSpPr>
-          <p:cNvPr id="216" name="V27.75"/>
+          <p:cNvPr id="216" name="V27.45"/>
           <p:cNvSpPr/>
           <p:nvPr/>
         </p:nvSpPr>
         <p:spPr>
           <a:xfrm>
-            <a:off x="7086600" y="2542032"/>
-            <a:ext cx="1554480" cy="411480"/>
+            <a:off x="6812280" y="2414016"/>
+            <a:ext cx="1828800" cy="356616"/>
           </a:xfrm>
           <a:prstGeom prst="roundRect">
             <a:avLst/>
@@ -24443,7 +24443,7 @@
                 </a:solidFill>
                 <a:latin typeface="Arial"/>
               </a:rPr>
-              <a:t>0.008 ± 0.001</a:t>
+              <a:t>0.008</a:t>
             </a:r>
           </a:p>
         </p:txBody>
@@ -24456,8 +24456,8 @@
         </p:nvSpPr>
         <p:spPr>
           <a:xfrm>
-            <a:off x="502920" y="2999232"/>
-            <a:ext cx="2834640" cy="411480"/>
+            <a:off x="502920" y="2807208"/>
+            <a:ext cx="2286000" cy="356616"/>
           </a:xfrm>
           <a:prstGeom prst="roundRect">
             <a:avLst/>
@@ -24504,14 +24504,14 @@
       </p:sp>
       <p:sp>
         <p:nvSpPr>
-          <p:cNvPr id="218" name="V33.75"/>
+          <p:cNvPr id="218" name="V33.15"/>
           <p:cNvSpPr/>
           <p:nvPr/>
         </p:nvSpPr>
         <p:spPr>
           <a:xfrm>
-            <a:off x="3429000" y="2999232"/>
-            <a:ext cx="1737360" cy="411480"/>
+            <a:off x="2880360" y="2807208"/>
+            <a:ext cx="1920240" cy="356616"/>
           </a:xfrm>
           <a:prstGeom prst="roundRect">
             <a:avLst/>
@@ -24551,21 +24551,21 @@
                 </a:solidFill>
                 <a:latin typeface="Arial"/>
               </a:rPr>
-              <a:t>0.994 ± 0.005</a:t>
+              <a:t>0.994 (0.991-0.996)</a:t>
             </a:r>
           </a:p>
         </p:txBody>
       </p:sp>
       <p:sp>
         <p:nvSpPr>
-          <p:cNvPr id="219" name="V35.75"/>
+          <p:cNvPr id="219" name="V35.3"/>
           <p:cNvSpPr/>
           <p:nvPr/>
         </p:nvSpPr>
         <p:spPr>
           <a:xfrm>
-            <a:off x="5257800" y="2999232"/>
-            <a:ext cx="1737360" cy="411480"/>
+            <a:off x="4846320" y="2807208"/>
+            <a:ext cx="1920240" cy="356616"/>
           </a:xfrm>
           <a:prstGeom prst="roundRect">
             <a:avLst/>
@@ -24605,21 +24605,21 @@
                 </a:solidFill>
                 <a:latin typeface="Arial"/>
               </a:rPr>
-              <a:t>0.994 ± 0.001</a:t>
+              <a:t>0.994 (0.991-0.996)</a:t>
             </a:r>
           </a:p>
         </p:txBody>
       </p:sp>
       <p:sp>
         <p:nvSpPr>
-          <p:cNvPr id="220" name="V37.75"/>
+          <p:cNvPr id="220" name="V37.45"/>
           <p:cNvSpPr/>
           <p:nvPr/>
         </p:nvSpPr>
         <p:spPr>
           <a:xfrm>
-            <a:off x="7086600" y="2999232"/>
-            <a:ext cx="1554480" cy="411480"/>
+            <a:off x="6812280" y="2807208"/>
+            <a:ext cx="1828800" cy="356616"/>
           </a:xfrm>
           <a:prstGeom prst="roundRect">
             <a:avLst/>
@@ -24659,7 +24659,7 @@
                 </a:solidFill>
                 <a:latin typeface="Arial"/>
               </a:rPr>
-              <a:t>0.990 ± 0.003</a:t>
+              <a:t>0.990 (0.988-0.993)</a:t>
             </a:r>
           </a:p>
         </p:txBody>
@@ -24672,8 +24672,8 @@
         </p:nvSpPr>
         <p:spPr>
           <a:xfrm>
-            <a:off x="502920" y="3456432"/>
-            <a:ext cx="2834640" cy="411480"/>
+            <a:off x="502920" y="3200400"/>
+            <a:ext cx="2286000" cy="356616"/>
           </a:xfrm>
           <a:prstGeom prst="roundRect">
             <a:avLst/>
@@ -24713,21 +24713,21 @@
                 </a:solidFill>
                 <a:latin typeface="Arial"/>
               </a:rPr>
-              <a:t>EyePACS: PR-AUC (early vs none)</a:t>
+              <a:t>EyePACS: ECE / Brier</a:t>
             </a:r>
           </a:p>
         </p:txBody>
       </p:sp>
       <p:sp>
         <p:nvSpPr>
-          <p:cNvPr id="222" name="V43.75"/>
+          <p:cNvPr id="222" name="V43.15"/>
           <p:cNvSpPr/>
           <p:nvPr/>
         </p:nvSpPr>
         <p:spPr>
           <a:xfrm>
-            <a:off x="3429000" y="3456432"/>
-            <a:ext cx="1737360" cy="411480"/>
+            <a:off x="2880360" y="3200400"/>
+            <a:ext cx="1920240" cy="356616"/>
           </a:xfrm>
           <a:prstGeom prst="roundRect">
             <a:avLst/>
@@ -24767,21 +24767,21 @@
                 </a:solidFill>
                 <a:latin typeface="Arial"/>
               </a:rPr>
-              <a:t>0.569 ± 0.028</a:t>
+              <a:t>0.326 / 0.300</a:t>
             </a:r>
           </a:p>
         </p:txBody>
       </p:sp>
       <p:sp>
         <p:nvSpPr>
-          <p:cNvPr id="223" name="V45.75"/>
+          <p:cNvPr id="223" name="V45.3"/>
           <p:cNvSpPr/>
           <p:nvPr/>
         </p:nvSpPr>
         <p:spPr>
           <a:xfrm>
-            <a:off x="5257800" y="3456432"/>
-            <a:ext cx="1737360" cy="411480"/>
+            <a:off x="4846320" y="3200400"/>
+            <a:ext cx="1920240" cy="356616"/>
           </a:xfrm>
           <a:prstGeom prst="roundRect">
             <a:avLst/>
@@ -24821,21 +24821,129 @@
                 </a:solidFill>
                 <a:latin typeface="Arial"/>
               </a:rPr>
-              <a:t>0.800 ± 0.002</a:t>
+              <a:t>0.056 / 0.091</a:t>
             </a:r>
           </a:p>
         </p:txBody>
       </p:sp>
       <p:sp>
         <p:nvSpPr>
-          <p:cNvPr id="224" name="V47.75"/>
+          <p:cNvPr id="224" name="V47.45"/>
           <p:cNvSpPr/>
           <p:nvPr/>
         </p:nvSpPr>
         <p:spPr>
           <a:xfrm>
-            <a:off x="7086600" y="3456432"/>
-            <a:ext cx="1554480" cy="411480"/>
+            <a:off x="6812280" y="3200400"/>
+            <a:ext cx="1828800" cy="356616"/>
+          </a:xfrm>
+          <a:prstGeom prst="roundRect">
+            <a:avLst/>
+          </a:prstGeom>
+          <a:solidFill>
+            <a:srgbClr val="FFE9D9"/>
+          </a:solidFill>
+          <a:ln w="9525">
+            <a:solidFill>
+              <a:srgbClr val="EB6834"/>
+            </a:solidFill>
+          </a:ln>
+        </p:spPr>
+        <p:style>
+          <a:lnRef idx="1">
+            <a:schemeClr val="accent1"/>
+          </a:lnRef>
+          <a:fillRef idx="3">
+            <a:schemeClr val="accent1"/>
+          </a:fillRef>
+          <a:effectRef idx="2">
+            <a:schemeClr val="accent1"/>
+          </a:effectRef>
+          <a:fontRef idx="minor">
+            <a:schemeClr val="lt1"/>
+          </a:fontRef>
+        </p:style>
+        <p:txBody>
+          <a:bodyPr wrap="square" lIns="91440" tIns="36576" rIns="91440" bIns="36576" rtlCol="0" anchor="ctr"/>
+          <a:lstStyle/>
+          <a:p>
+            <a:pPr algn="ctr"/>
+            <a:r>
+              <a:rPr sz="1000" b="0">
+                <a:solidFill>
+                  <a:srgbClr val="3a3a3a"/>
+                </a:solidFill>
+                <a:latin typeface="Arial"/>
+              </a:rPr>
+              <a:t>0.717 / 0.707</a:t>
+            </a:r>
+          </a:p>
+        </p:txBody>
+      </p:sp>
+      <p:sp>
+        <p:nvSpPr>
+          <p:cNvPr id="225" name="M5"/>
+          <p:cNvSpPr/>
+          <p:nvPr/>
+        </p:nvSpPr>
+        <p:spPr>
+          <a:xfrm>
+            <a:off x="502920" y="3593591"/>
+            <a:ext cx="2286000" cy="356616"/>
+          </a:xfrm>
+          <a:prstGeom prst="roundRect">
+            <a:avLst/>
+          </a:prstGeom>
+          <a:solidFill>
+            <a:srgbClr val="E4ECF6"/>
+          </a:solidFill>
+          <a:ln w="9525">
+            <a:solidFill>
+              <a:srgbClr val="BCCFE4"/>
+            </a:solidFill>
+          </a:ln>
+        </p:spPr>
+        <p:style>
+          <a:lnRef idx="1">
+            <a:schemeClr val="accent1"/>
+          </a:lnRef>
+          <a:fillRef idx="3">
+            <a:schemeClr val="accent1"/>
+          </a:fillRef>
+          <a:effectRef idx="2">
+            <a:schemeClr val="accent1"/>
+          </a:effectRef>
+          <a:fontRef idx="minor">
+            <a:schemeClr val="lt1"/>
+          </a:fontRef>
+        </p:style>
+        <p:txBody>
+          <a:bodyPr wrap="square" lIns="91440" tIns="36576" rIns="91440" bIns="36576" rtlCol="0" anchor="ctr"/>
+          <a:lstStyle/>
+          <a:p>
+            <a:pPr algn="l"/>
+            <a:r>
+              <a:rPr sz="1000" b="1">
+                <a:solidFill>
+                  <a:srgbClr val="121212"/>
+                </a:solidFill>
+                <a:latin typeface="Arial"/>
+              </a:rPr>
+              <a:t>APTOS: ECE / Brier</a:t>
+            </a:r>
+          </a:p>
+        </p:txBody>
+      </p:sp>
+      <p:sp>
+        <p:nvSpPr>
+          <p:cNvPr id="226" name="V53.15"/>
+          <p:cNvSpPr/>
+          <p:nvPr/>
+        </p:nvSpPr>
+        <p:spPr>
+          <a:xfrm>
+            <a:off x="2880360" y="3593591"/>
+            <a:ext cx="1920240" cy="356616"/>
           </a:xfrm>
           <a:prstGeom prst="roundRect">
             <a:avLst/>
@@ -24875,21 +24983,129 @@
                 </a:solidFill>
                 <a:latin typeface="Arial"/>
               </a:rPr>
-              <a:t>0.465 ± 0.019</a:t>
+              <a:t>0.219 / 0.151</a:t>
             </a:r>
           </a:p>
         </p:txBody>
       </p:sp>
       <p:sp>
         <p:nvSpPr>
-          <p:cNvPr id="225" name="Note"/>
+          <p:cNvPr id="227" name="V55.3"/>
           <p:cNvSpPr/>
           <p:nvPr/>
         </p:nvSpPr>
         <p:spPr>
           <a:xfrm>
-            <a:off x="502920" y="3931920"/>
-            <a:ext cx="8138160" cy="347472"/>
+            <a:off x="4846320" y="3593591"/>
+            <a:ext cx="1920240" cy="356616"/>
+          </a:xfrm>
+          <a:prstGeom prst="roundRect">
+            <a:avLst/>
+          </a:prstGeom>
+          <a:solidFill>
+            <a:srgbClr val="FFFFFF"/>
+          </a:solidFill>
+          <a:ln w="9525">
+            <a:solidFill>
+              <a:srgbClr val="CDD2D7"/>
+            </a:solidFill>
+          </a:ln>
+        </p:spPr>
+        <p:style>
+          <a:lnRef idx="1">
+            <a:schemeClr val="accent1"/>
+          </a:lnRef>
+          <a:fillRef idx="3">
+            <a:schemeClr val="accent1"/>
+          </a:fillRef>
+          <a:effectRef idx="2">
+            <a:schemeClr val="accent1"/>
+          </a:effectRef>
+          <a:fontRef idx="minor">
+            <a:schemeClr val="lt1"/>
+          </a:fontRef>
+        </p:style>
+        <p:txBody>
+          <a:bodyPr wrap="square" lIns="91440" tIns="36576" rIns="91440" bIns="36576" rtlCol="0" anchor="ctr"/>
+          <a:lstStyle/>
+          <a:p>
+            <a:pPr algn="ctr"/>
+            <a:r>
+              <a:rPr sz="1000" b="0">
+                <a:solidFill>
+                  <a:srgbClr val="3a3a3a"/>
+                </a:solidFill>
+                <a:latin typeface="Arial"/>
+              </a:rPr>
+              <a:t>0.082 / 0.046</a:t>
+            </a:r>
+          </a:p>
+        </p:txBody>
+      </p:sp>
+      <p:sp>
+        <p:nvSpPr>
+          <p:cNvPr id="228" name="V57.45"/>
+          <p:cNvSpPr/>
+          <p:nvPr/>
+        </p:nvSpPr>
+        <p:spPr>
+          <a:xfrm>
+            <a:off x="6812280" y="3593591"/>
+            <a:ext cx="1828800" cy="356616"/>
+          </a:xfrm>
+          <a:prstGeom prst="roundRect">
+            <a:avLst/>
+          </a:prstGeom>
+          <a:solidFill>
+            <a:srgbClr val="FFFFFF"/>
+          </a:solidFill>
+          <a:ln w="9525">
+            <a:solidFill>
+              <a:srgbClr val="CDD2D7"/>
+            </a:solidFill>
+          </a:ln>
+        </p:spPr>
+        <p:style>
+          <a:lnRef idx="1">
+            <a:schemeClr val="accent1"/>
+          </a:lnRef>
+          <a:fillRef idx="3">
+            <a:schemeClr val="accent1"/>
+          </a:fillRef>
+          <a:effectRef idx="2">
+            <a:schemeClr val="accent1"/>
+          </a:effectRef>
+          <a:fontRef idx="minor">
+            <a:schemeClr val="lt1"/>
+          </a:fontRef>
+        </p:style>
+        <p:txBody>
+          <a:bodyPr wrap="square" lIns="91440" tIns="36576" rIns="91440" bIns="36576" rtlCol="0" anchor="ctr"/>
+          <a:lstStyle/>
+          <a:p>
+            <a:pPr algn="ctr"/>
+            <a:r>
+              <a:rPr sz="1000" b="0">
+                <a:solidFill>
+                  <a:srgbClr val="3a3a3a"/>
+                </a:solidFill>
+                <a:latin typeface="Arial"/>
+              </a:rPr>
+              <a:t>0.313 / 0.246</a:t>
+            </a:r>
+          </a:p>
+        </p:txBody>
+      </p:sp>
+      <p:sp>
+        <p:nvSpPr>
+          <p:cNvPr id="229" name="Note"/>
+          <p:cNvSpPr/>
+          <p:nvPr/>
+        </p:nvSpPr>
+        <p:spPr>
+          <a:xfrm>
+            <a:off x="502920" y="4005072"/>
+            <a:ext cx="8138160" cy="292608"/>
           </a:xfrm>
           <a:prstGeom prst="roundRect">
             <a:avLst/>
@@ -24923,13 +25139,13 @@
           <a:p>
             <a:pPr algn="l"/>
             <a:r>
-              <a:rPr sz="950" b="0">
+              <a:rPr sz="900" b="0">
                 <a:solidFill>
                   <a:srgbClr val="3a3a3a"/>
                 </a:solidFill>
                 <a:latin typeface="Arial"/>
               </a:rPr>
-              <a:t>Group-split models, mean ± sd over seeds 42, 43, 44. A = DDR only. B = DDR + all EyePACS, source-balanced. C = DDR + EyePACS grades 1, 3, 4. ECE, Brier and intervals still to report.</a:t>
+              <a:t>Group-split models, mean over seeds 42, 43, 44 with 95% patient-level bootstrap intervals. ECE and Brier: any DR vs No DR, all grades; lower is better.</a:t>
             </a:r>
           </a:p>
         </p:txBody>
@@ -26425,7 +26641,7 @@
                 </a:solidFill>
                 <a:latin typeface="Arial"/>
               </a:rPr>
-              <a:t>Arm B: EyePACS specificity 0.89, AUROC 0.88; DDR sensitivity unchanged.</a:t>
+              <a:t>Arm B: EyePACS AUROC 0.884 (0.870-0.897), specificity 0.90, ECE 0.056 vs 0.326 (A) and 0.717 (C).</a:t>
             </a:r>
           </a:p>
         </p:txBody>
